--- a/templates/17-decision-modelling-template.pptx
+++ b/templates/17-decision-modelling-template.pptx
@@ -3558,7 +3558,7 @@
         <p:spPr>
           <a:xfrm>
             <a:off x="457200" y="1207008"/>
-            <a:ext cx="2743200" cy="182880"/>
+            <a:ext cx="11277295" cy="274320"/>
           </a:xfrm>
           <a:prstGeom prst="rect">
             <a:avLst/>
@@ -3574,13 +3574,13 @@
           <a:p>
             <a:pPr algn="l"/>
             <a:r>
-              <a:rPr lang="en-AU" sz="800" b="1" dirty="0">
+              <a:rPr lang="en-AU" sz="1250" b="1" dirty="0">
                 <a:solidFill>
-                  <a:srgbClr val="6B6A66"/>
+                  <a:srgbClr val="184F95"/>
                 </a:solidFill>
                 <a:latin typeface="Aptos"/>
               </a:rPr>
-              <a:t>HOW TO FILL IT IN</a:t>
+              <a:t>Decision Modelling — blank template</a:t>
             </a:r>
           </a:p>
         </p:txBody>
@@ -3593,8 +3593,8 @@
         </p:nvSpPr>
         <p:spPr>
           <a:xfrm>
-            <a:off x="457200" y="1408176"/>
-            <a:ext cx="2743200" cy="914400"/>
+            <a:off x="457200" y="6089904"/>
+            <a:ext cx="11277295" cy="347472"/>
           </a:xfrm>
           <a:prstGeom prst="rect">
             <a:avLst/>
@@ -3610,9 +3610,9 @@
           <a:p>
             <a:pPr algn="l"/>
             <a:r>
-              <a:rPr lang="en-AU" sz="950" dirty="0">
+              <a:rPr lang="en-AU" sz="850" dirty="0">
                 <a:solidFill>
-                  <a:srgbClr val="0B0B0B"/>
+                  <a:srgbClr val="6B6A66"/>
                 </a:solidFill>
                 <a:latin typeface="Aptos"/>
               </a:rPr>
@@ -3629,8 +3629,8 @@
         </p:nvSpPr>
         <p:spPr>
           <a:xfrm>
-            <a:off x="457200" y="2414016"/>
-            <a:ext cx="2743200" cy="182880"/>
+            <a:off x="457200" y="1481328"/>
+            <a:ext cx="11277295" cy="201168"/>
           </a:xfrm>
           <a:prstGeom prst="rect">
             <a:avLst/>
@@ -3641,254 +3641,6 @@
           </a:ln>
         </p:spPr>
         <p:txBody>
-          <a:bodyPr wrap="square" anchor="b" lIns="0" rIns="0" tIns="27432" bIns="27432"/>
-          <a:lstStyle/>
-          <a:p>
-            <a:pPr algn="l"/>
-            <a:r>
-              <a:rPr lang="en-AU" sz="800" b="1" dirty="0">
-                <a:solidFill>
-                  <a:srgbClr val="6B6A66"/>
-                </a:solidFill>
-                <a:latin typeface="Aptos"/>
-              </a:rPr>
-              <a:t>WHAT IT IS FOR</a:t>
-            </a:r>
-          </a:p>
-        </p:txBody>
-      </p:sp>
-      <p:sp>
-        <p:nvSpPr>
-          <p:cNvPr id="46" name="shape46"/>
-          <p:cNvSpPr/>
-          <p:nvPr/>
-        </p:nvSpPr>
-        <p:spPr>
-          <a:xfrm>
-            <a:off x="457200" y="2615184"/>
-            <a:ext cx="2743200" cy="731520"/>
-          </a:xfrm>
-          <a:prstGeom prst="rect">
-            <a:avLst/>
-          </a:prstGeom>
-          <a:noFill/>
-          <a:ln>
-            <a:noFill/>
-          </a:ln>
-        </p:spPr>
-        <p:txBody>
-          <a:bodyPr wrap="square" anchor="t" lIns="0" rIns="0" tIns="27432" bIns="27432"/>
-          <a:lstStyle/>
-          <a:p>
-            <a:pPr algn="l"/>
-            <a:r>
-              <a:rPr lang="en-AU" sz="950" dirty="0">
-                <a:solidFill>
-                  <a:srgbClr val="0B0B0B"/>
-                </a:solidFill>
-                <a:latin typeface="Aptos"/>
-              </a:rPr>
-              <a:t>Represents repeatable operational decisions and the logic behind them, so the same inputs always yield the same outcome.</a:t>
-            </a:r>
-          </a:p>
-        </p:txBody>
-      </p:sp>
-      <p:sp>
-        <p:nvSpPr>
-          <p:cNvPr id="47" name="shape47"/>
-          <p:cNvSpPr/>
-          <p:nvPr/>
-        </p:nvSpPr>
-        <p:spPr>
-          <a:xfrm>
-            <a:off x="457200" y="3438144"/>
-            <a:ext cx="2743200" cy="182880"/>
-          </a:xfrm>
-          <a:prstGeom prst="rect">
-            <a:avLst/>
-          </a:prstGeom>
-          <a:noFill/>
-          <a:ln>
-            <a:noFill/>
-          </a:ln>
-        </p:spPr>
-        <p:txBody>
-          <a:bodyPr wrap="square" anchor="b" lIns="0" rIns="0" tIns="27432" bIns="27432"/>
-          <a:lstStyle/>
-          <a:p>
-            <a:pPr algn="l"/>
-            <a:r>
-              <a:rPr lang="en-AU" sz="800" b="1" dirty="0">
-                <a:solidFill>
-                  <a:srgbClr val="6B6A66"/>
-                </a:solidFill>
-                <a:latin typeface="Aptos"/>
-              </a:rPr>
-              <a:t>MOST OFTEN CONFUSED WITH</a:t>
-            </a:r>
-          </a:p>
-        </p:txBody>
-      </p:sp>
-      <p:sp>
-        <p:nvSpPr>
-          <p:cNvPr id="48" name="shape48"/>
-          <p:cNvSpPr/>
-          <p:nvPr/>
-        </p:nvSpPr>
-        <p:spPr>
-          <a:xfrm>
-            <a:off x="457200" y="3639312"/>
-            <a:ext cx="2743200" cy="1737360"/>
-          </a:xfrm>
-          <a:prstGeom prst="rect">
-            <a:avLst/>
-          </a:prstGeom>
-          <a:solidFill>
-            <a:srgbClr val="F7F7F5"/>
-          </a:solidFill>
-          <a:ln>
-            <a:noFill/>
-          </a:ln>
-        </p:spPr>
-        <p:txBody>
-          <a:bodyPr wrap="square" anchor="t" lIns="91440" rIns="91440" tIns="27432" bIns="27432"/>
-          <a:lstStyle/>
-          <a:p>
-            <a:pPr algn="l"/>
-            <a:r>
-              <a:rPr lang="en-AU" sz="900" dirty="0">
-                <a:solidFill>
-                  <a:srgbClr val="0B0B0B"/>
-                </a:solidFill>
-                <a:latin typeface="Aptos"/>
-              </a:rPr>
-              <a:t>Decision modelling documents a recurring operational decision; decision analysis supports a one-off strategic choice. Frequency is the tell.</a:t>
-            </a:r>
-          </a:p>
-        </p:txBody>
-      </p:sp>
-      <p:sp>
-        <p:nvSpPr>
-          <p:cNvPr id="49" name="shape49"/>
-          <p:cNvSpPr/>
-          <p:nvPr/>
-        </p:nvSpPr>
-        <p:spPr>
-          <a:xfrm>
-            <a:off x="457200" y="3639312"/>
-            <a:ext cx="32004" cy="1737360"/>
-          </a:xfrm>
-          <a:prstGeom prst="rect">
-            <a:avLst/>
-          </a:prstGeom>
-          <a:solidFill>
-            <a:srgbClr val="FAB219"/>
-          </a:solidFill>
-          <a:ln>
-            <a:noFill/>
-          </a:ln>
-        </p:spPr>
-        <p:txBody>
-          <a:bodyPr wrap="square" anchor="ctr" lIns="54864" rIns="54864" tIns="27432" bIns="27432"/>
-          <a:lstStyle/>
-          <a:p>
-            <a:pPr algn="l"/>
-            <a:endParaRPr lang="en-AU" sz="1100"/>
-          </a:p>
-        </p:txBody>
-      </p:sp>
-      <p:sp>
-        <p:nvSpPr>
-          <p:cNvPr id="50" name="shape50"/>
-          <p:cNvSpPr/>
-          <p:nvPr/>
-        </p:nvSpPr>
-        <p:spPr>
-          <a:xfrm>
-            <a:off x="457200" y="5486400"/>
-            <a:ext cx="2743200" cy="502920"/>
-          </a:xfrm>
-          <a:prstGeom prst="rect">
-            <a:avLst/>
-          </a:prstGeom>
-          <a:noFill/>
-          <a:ln>
-            <a:noFill/>
-          </a:ln>
-        </p:spPr>
-        <p:txBody>
-          <a:bodyPr wrap="square" anchor="t" lIns="0" rIns="0" tIns="27432" bIns="27432"/>
-          <a:lstStyle/>
-          <a:p>
-            <a:pPr algn="l"/>
-            <a:r>
-              <a:rPr lang="en-AU" sz="800" dirty="0">
-                <a:solidFill>
-                  <a:srgbClr val="6B6A66"/>
-                </a:solidFill>
-                <a:latin typeface="Aptos"/>
-              </a:rPr>
-              <a:t>Tasks: 7.1 Specify and Model Requirements · 6.1 Analyze Current State</a:t>
-            </a:r>
-          </a:p>
-        </p:txBody>
-      </p:sp>
-      <p:sp>
-        <p:nvSpPr>
-          <p:cNvPr id="51" name="shape51"/>
-          <p:cNvSpPr/>
-          <p:nvPr/>
-        </p:nvSpPr>
-        <p:spPr>
-          <a:xfrm>
-            <a:off x="3520440" y="1188720"/>
-            <a:ext cx="8214055" cy="237744"/>
-          </a:xfrm>
-          <a:prstGeom prst="rect">
-            <a:avLst/>
-          </a:prstGeom>
-          <a:noFill/>
-          <a:ln>
-            <a:noFill/>
-          </a:ln>
-        </p:spPr>
-        <p:txBody>
-          <a:bodyPr wrap="square" anchor="b" lIns="0" rIns="0" tIns="27432" bIns="27432"/>
-          <a:lstStyle/>
-          <a:p>
-            <a:pPr algn="l"/>
-            <a:r>
-              <a:rPr lang="en-AU" sz="1050" b="1" dirty="0">
-                <a:solidFill>
-                  <a:srgbClr val="184F95"/>
-                </a:solidFill>
-                <a:latin typeface="Aptos"/>
-              </a:rPr>
-              <a:t>Decision Modelling — blank template</a:t>
-            </a:r>
-          </a:p>
-        </p:txBody>
-      </p:sp>
-      <p:sp>
-        <p:nvSpPr>
-          <p:cNvPr id="52" name="shape52"/>
-          <p:cNvSpPr/>
-          <p:nvPr/>
-        </p:nvSpPr>
-        <p:spPr>
-          <a:xfrm>
-            <a:off x="3520440" y="1280160"/>
-            <a:ext cx="8214055" cy="201168"/>
-          </a:xfrm>
-          <a:prstGeom prst="rect">
-            <a:avLst/>
-          </a:prstGeom>
-          <a:noFill/>
-          <a:ln>
-            <a:noFill/>
-          </a:ln>
-        </p:spPr>
-        <p:txBody>
           <a:bodyPr wrap="square" anchor="ctr" lIns="54864" rIns="54864" tIns="27432" bIns="27432"/>
           <a:lstStyle/>
           <a:p>
@@ -3907,14 +3659,14 @@
       </p:sp>
       <p:sp>
         <p:nvSpPr>
-          <p:cNvPr id="53" name="shape53"/>
+          <p:cNvPr id="46" name="shape46"/>
           <p:cNvSpPr/>
           <p:nvPr/>
         </p:nvSpPr>
         <p:spPr>
           <a:xfrm>
-            <a:off x="3520440" y="1499616"/>
-            <a:ext cx="8214055" cy="338328"/>
+            <a:off x="457200" y="1700784"/>
+            <a:ext cx="11277295" cy="338328"/>
           </a:xfrm>
           <a:prstGeom prst="roundRect">
             <a:avLst>
@@ -3949,14 +3701,14 @@
       </p:sp>
       <p:sp>
         <p:nvSpPr>
-          <p:cNvPr id="54" name="shape54"/>
+          <p:cNvPr id="47" name="shape47"/>
           <p:cNvSpPr/>
           <p:nvPr/>
         </p:nvSpPr>
         <p:spPr>
           <a:xfrm>
-            <a:off x="3904488" y="1883664"/>
-            <a:ext cx="7830007" cy="338328"/>
+            <a:off x="841248" y="2084832"/>
+            <a:ext cx="10893247" cy="338328"/>
           </a:xfrm>
           <a:prstGeom prst="roundRect">
             <a:avLst>
@@ -3991,13 +3743,13 @@
       </p:sp>
       <p:cxnSp>
         <p:nvCxnSpPr>
-          <p:cNvPr id="55" name="conn55"/>
+          <p:cNvPr id="48" name="conn48"/>
           <p:cNvCxnSpPr/>
           <p:nvPr/>
         </p:nvCxnSpPr>
         <p:spPr>
           <a:xfrm>
-            <a:off x="3776472" y="2052828"/>
+            <a:off x="713232" y="2253996"/>
             <a:ext cx="128016" cy="1"/>
           </a:xfrm>
           <a:prstGeom prst="line">
@@ -4012,14 +3764,14 @@
       </p:cxnSp>
       <p:sp>
         <p:nvSpPr>
-          <p:cNvPr id="56" name="shape56"/>
+          <p:cNvPr id="49" name="shape49"/>
           <p:cNvSpPr/>
           <p:nvPr/>
         </p:nvSpPr>
         <p:spPr>
           <a:xfrm>
-            <a:off x="4288536" y="2267712"/>
-            <a:ext cx="7445959" cy="338328"/>
+            <a:off x="1225296" y="2468880"/>
+            <a:ext cx="10509199" cy="338328"/>
           </a:xfrm>
           <a:prstGeom prst="roundRect">
             <a:avLst>
@@ -4054,13 +3806,13 @@
       </p:sp>
       <p:cxnSp>
         <p:nvCxnSpPr>
-          <p:cNvPr id="57" name="conn57"/>
+          <p:cNvPr id="50" name="conn50"/>
           <p:cNvCxnSpPr/>
           <p:nvPr/>
         </p:nvCxnSpPr>
         <p:spPr>
           <a:xfrm>
-            <a:off x="4160520" y="2436876"/>
+            <a:off x="1097280" y="2638044"/>
             <a:ext cx="128016" cy="1"/>
           </a:xfrm>
           <a:prstGeom prst="line">
@@ -4075,14 +3827,14 @@
       </p:cxnSp>
       <p:sp>
         <p:nvSpPr>
-          <p:cNvPr id="58" name="shape58"/>
+          <p:cNvPr id="51" name="shape51"/>
           <p:cNvSpPr/>
           <p:nvPr/>
         </p:nvSpPr>
         <p:spPr>
           <a:xfrm>
-            <a:off x="4288536" y="2651760"/>
-            <a:ext cx="7445959" cy="338328"/>
+            <a:off x="1225296" y="2852928"/>
+            <a:ext cx="10509199" cy="338328"/>
           </a:xfrm>
           <a:prstGeom prst="roundRect">
             <a:avLst>
@@ -4117,13 +3869,13 @@
       </p:sp>
       <p:cxnSp>
         <p:nvCxnSpPr>
-          <p:cNvPr id="59" name="conn59"/>
+          <p:cNvPr id="52" name="conn52"/>
           <p:cNvCxnSpPr/>
           <p:nvPr/>
         </p:nvCxnSpPr>
         <p:spPr>
           <a:xfrm>
-            <a:off x="4160520" y="2820924"/>
+            <a:off x="1097280" y="3022092"/>
             <a:ext cx="128016" cy="1"/>
           </a:xfrm>
           <a:prstGeom prst="line">
@@ -4138,14 +3890,14 @@
       </p:cxnSp>
       <p:sp>
         <p:nvSpPr>
-          <p:cNvPr id="60" name="shape60"/>
+          <p:cNvPr id="53" name="shape53"/>
           <p:cNvSpPr/>
           <p:nvPr/>
         </p:nvSpPr>
         <p:spPr>
           <a:xfrm>
-            <a:off x="3904488" y="3035808"/>
-            <a:ext cx="7830007" cy="338328"/>
+            <a:off x="841248" y="3236976"/>
+            <a:ext cx="10893247" cy="338328"/>
           </a:xfrm>
           <a:prstGeom prst="roundRect">
             <a:avLst>
@@ -4180,13 +3932,13 @@
       </p:sp>
       <p:cxnSp>
         <p:nvCxnSpPr>
-          <p:cNvPr id="61" name="conn61"/>
+          <p:cNvPr id="54" name="conn54"/>
           <p:cNvCxnSpPr/>
           <p:nvPr/>
         </p:nvCxnSpPr>
         <p:spPr>
           <a:xfrm>
-            <a:off x="3776472" y="3204972"/>
+            <a:off x="713232" y="3406140"/>
             <a:ext cx="128016" cy="1"/>
           </a:xfrm>
           <a:prstGeom prst="line">
@@ -4201,14 +3953,14 @@
       </p:cxnSp>
       <p:sp>
         <p:nvSpPr>
-          <p:cNvPr id="62" name="shape62"/>
+          <p:cNvPr id="55" name="shape55"/>
           <p:cNvSpPr/>
           <p:nvPr/>
         </p:nvSpPr>
         <p:spPr>
           <a:xfrm>
-            <a:off x="4288536" y="3419856"/>
-            <a:ext cx="7445959" cy="338328"/>
+            <a:off x="1225296" y="3621024"/>
+            <a:ext cx="10509199" cy="338328"/>
           </a:xfrm>
           <a:prstGeom prst="roundRect">
             <a:avLst>
@@ -4243,13 +3995,13 @@
       </p:sp>
       <p:cxnSp>
         <p:nvCxnSpPr>
-          <p:cNvPr id="63" name="conn63"/>
+          <p:cNvPr id="56" name="conn56"/>
           <p:cNvCxnSpPr/>
           <p:nvPr/>
         </p:nvCxnSpPr>
         <p:spPr>
           <a:xfrm>
-            <a:off x="4160520" y="3589020"/>
+            <a:off x="1097280" y="3790188"/>
             <a:ext cx="128016" cy="1"/>
           </a:xfrm>
           <a:prstGeom prst="line">
@@ -4264,14 +4016,14 @@
       </p:cxnSp>
       <p:sp>
         <p:nvSpPr>
-          <p:cNvPr id="64" name="shape64"/>
+          <p:cNvPr id="57" name="shape57"/>
           <p:cNvSpPr/>
           <p:nvPr/>
         </p:nvSpPr>
         <p:spPr>
           <a:xfrm>
-            <a:off x="4288536" y="3803904"/>
-            <a:ext cx="7445959" cy="338328"/>
+            <a:off x="1225296" y="4005072"/>
+            <a:ext cx="10509199" cy="338328"/>
           </a:xfrm>
           <a:prstGeom prst="roundRect">
             <a:avLst>
@@ -4306,13 +4058,13 @@
       </p:sp>
       <p:cxnSp>
         <p:nvCxnSpPr>
-          <p:cNvPr id="65" name="conn65"/>
+          <p:cNvPr id="58" name="conn58"/>
           <p:cNvCxnSpPr/>
           <p:nvPr/>
         </p:nvCxnSpPr>
         <p:spPr>
           <a:xfrm>
-            <a:off x="4160520" y="3973068"/>
+            <a:off x="1097280" y="4174236"/>
             <a:ext cx="128016" cy="1"/>
           </a:xfrm>
           <a:prstGeom prst="line">
